--- a/videos/deep-learning/001_transformers_part1/recreated_pptx/slide_019_recreated.pptx
+++ b/videos/deep-learning/001_transformers_part1/recreated_pptx/slide_019_recreated.pptx
@@ -7640,6 +7640,131 @@
         </p:nvSpPr>
         <p:spPr>
           <a:xfrm>
+            <a:off x="8013700" y="3403600"/>
+            <a:ext cx="1193800" cy="1079500"/>
+          </a:xfrm>
+          <a:prstGeom prst="rect">
+            <a:avLst/>
+          </a:prstGeom>
+          <a:solidFill>
+            <a:srgbClr val="C8A888"/>
+          </a:solidFill>
+          <a:ln w="3175">
+            <a:solidFill>
+              <a:srgbClr val="C8A888"/>
+            </a:solidFill>
+            <a:prstDash val="solid"/>
+          </a:ln>
+        </p:spPr>
+      </p:sp>
+      <p:sp>
+        <p:nvSpPr>
+          <p:cNvPr id="234" name="Shape 232"/>
+          <p:cNvSpPr/>
+          <p:nvPr/>
+        </p:nvSpPr>
+        <p:spPr>
+          <a:xfrm>
+            <a:off x="8013700" y="4419600"/>
+            <a:ext cx="228600" cy="279400"/>
+          </a:xfrm>
+          <a:prstGeom prst="rect">
+            <a:avLst/>
+          </a:prstGeom>
+          <a:solidFill>
+            <a:srgbClr val="C8A888"/>
+          </a:solidFill>
+          <a:ln w="3175">
+            <a:solidFill>
+              <a:srgbClr val="C8A888"/>
+            </a:solidFill>
+            <a:prstDash val="solid"/>
+          </a:ln>
+        </p:spPr>
+      </p:sp>
+      <p:sp>
+        <p:nvSpPr>
+          <p:cNvPr id="235" name="Shape 233"/>
+          <p:cNvSpPr/>
+          <p:nvPr/>
+        </p:nvSpPr>
+        <p:spPr>
+          <a:xfrm>
+            <a:off x="9474200" y="2578100"/>
+            <a:ext cx="1181100" cy="215900"/>
+          </a:xfrm>
+          <a:prstGeom prst="rect">
+            <a:avLst/>
+          </a:prstGeom>
+          <a:solidFill>
+            <a:srgbClr val="B0B070"/>
+          </a:solidFill>
+          <a:ln w="3175">
+            <a:solidFill>
+              <a:srgbClr val="B0B070"/>
+            </a:solidFill>
+            <a:prstDash val="solid"/>
+          </a:ln>
+        </p:spPr>
+      </p:sp>
+      <p:sp>
+        <p:nvSpPr>
+          <p:cNvPr id="236" name="Shape 234"/>
+          <p:cNvSpPr/>
+          <p:nvPr/>
+        </p:nvSpPr>
+        <p:spPr>
+          <a:xfrm>
+            <a:off x="9474200" y="2806700"/>
+            <a:ext cx="1181100" cy="558800"/>
+          </a:xfrm>
+          <a:prstGeom prst="rect">
+            <a:avLst/>
+          </a:prstGeom>
+          <a:solidFill>
+            <a:srgbClr val="B0B070"/>
+          </a:solidFill>
+          <a:ln w="3175">
+            <a:solidFill>
+              <a:srgbClr val="B0B070"/>
+            </a:solidFill>
+            <a:prstDash val="solid"/>
+          </a:ln>
+        </p:spPr>
+      </p:sp>
+      <p:sp>
+        <p:nvSpPr>
+          <p:cNvPr id="237" name="Shape 235"/>
+          <p:cNvSpPr/>
+          <p:nvPr/>
+        </p:nvSpPr>
+        <p:spPr>
+          <a:xfrm>
+            <a:off x="9474200" y="3365500"/>
+            <a:ext cx="1181100" cy="152400"/>
+          </a:xfrm>
+          <a:prstGeom prst="rect">
+            <a:avLst/>
+          </a:prstGeom>
+          <a:solidFill>
+            <a:srgbClr val="B0B070"/>
+          </a:solidFill>
+          <a:ln w="3175">
+            <a:solidFill>
+              <a:srgbClr val="B0B070"/>
+            </a:solidFill>
+            <a:prstDash val="solid"/>
+          </a:ln>
+        </p:spPr>
+      </p:sp>
+      <p:sp>
+        <p:nvSpPr>
+          <p:cNvPr id="238" name="Shape 236"/>
+          <p:cNvSpPr/>
+          <p:nvPr/>
+        </p:nvSpPr>
+        <p:spPr>
+          <a:xfrm>
             <a:off x="1790700" y="1295400"/>
             <a:ext cx="2552700" cy="355600"/>
           </a:xfrm>
@@ -7659,7 +7784,7 @@
       </p:sp>
       <p:sp>
         <p:nvSpPr>
-          <p:cNvPr id="234" name="Text 232"/>
+          <p:cNvPr id="239" name="Text 237"/>
           <p:cNvSpPr/>
           <p:nvPr/>
         </p:nvSpPr>
@@ -7698,7 +7823,7 @@
       </p:sp>
       <p:sp>
         <p:nvSpPr>
-          <p:cNvPr id="235" name="Shape 233"/>
+          <p:cNvPr id="240" name="Shape 238"/>
           <p:cNvSpPr/>
           <p:nvPr/>
         </p:nvSpPr>
@@ -7723,7 +7848,7 @@
       </p:sp>
       <p:sp>
         <p:nvSpPr>
-          <p:cNvPr id="236" name="Text 234"/>
+          <p:cNvPr id="241" name="Text 239"/>
           <p:cNvSpPr/>
           <p:nvPr/>
         </p:nvSpPr>
@@ -7762,7 +7887,7 @@
       </p:sp>
       <p:sp>
         <p:nvSpPr>
-          <p:cNvPr id="237" name="Shape 235"/>
+          <p:cNvPr id="242" name="Shape 240"/>
           <p:cNvSpPr/>
           <p:nvPr/>
         </p:nvSpPr>
@@ -7787,7 +7912,7 @@
       </p:sp>
       <p:sp>
         <p:nvSpPr>
-          <p:cNvPr id="238" name="Text 236"/>
+          <p:cNvPr id="243" name="Text 241"/>
           <p:cNvSpPr/>
           <p:nvPr/>
         </p:nvSpPr>
@@ -7826,7 +7951,7 @@
       </p:sp>
       <p:sp>
         <p:nvSpPr>
-          <p:cNvPr id="239" name="Shape 237"/>
+          <p:cNvPr id="244" name="Shape 242"/>
           <p:cNvSpPr/>
           <p:nvPr/>
         </p:nvSpPr>
@@ -7849,7 +7974,7 @@
       </p:sp>
       <p:sp>
         <p:nvSpPr>
-          <p:cNvPr id="240" name="Shape 238"/>
+          <p:cNvPr id="245" name="Shape 243"/>
           <p:cNvSpPr/>
           <p:nvPr/>
         </p:nvSpPr>
@@ -7872,7 +7997,7 @@
       </p:sp>
       <p:sp>
         <p:nvSpPr>
-          <p:cNvPr id="241" name="Shape 239"/>
+          <p:cNvPr id="246" name="Shape 244"/>
           <p:cNvSpPr/>
           <p:nvPr/>
         </p:nvSpPr>
@@ -7895,7 +8020,7 @@
       </p:sp>
       <p:sp>
         <p:nvSpPr>
-          <p:cNvPr id="242" name="Shape 240"/>
+          <p:cNvPr id="247" name="Shape 245"/>
           <p:cNvSpPr/>
           <p:nvPr/>
         </p:nvSpPr>
@@ -7918,7 +8043,7 @@
       </p:sp>
       <p:sp>
         <p:nvSpPr>
-          <p:cNvPr id="243" name="Shape 241"/>
+          <p:cNvPr id="248" name="Shape 246"/>
           <p:cNvSpPr/>
           <p:nvPr/>
         </p:nvSpPr>
@@ -7941,7 +8066,7 @@
       </p:sp>
       <p:sp>
         <p:nvSpPr>
-          <p:cNvPr id="244" name="Shape 242"/>
+          <p:cNvPr id="249" name="Shape 247"/>
           <p:cNvSpPr/>
           <p:nvPr/>
         </p:nvSpPr>
@@ -7964,7 +8089,7 @@
       </p:sp>
       <p:sp>
         <p:nvSpPr>
-          <p:cNvPr id="245" name="Shape 243"/>
+          <p:cNvPr id="250" name="Shape 248"/>
           <p:cNvSpPr/>
           <p:nvPr/>
         </p:nvSpPr>
@@ -7987,7 +8112,7 @@
       </p:sp>
       <p:sp>
         <p:nvSpPr>
-          <p:cNvPr id="246" name="Shape 244"/>
+          <p:cNvPr id="251" name="Shape 249"/>
           <p:cNvSpPr/>
           <p:nvPr/>
         </p:nvSpPr>
@@ -8010,7 +8135,7 @@
       </p:sp>
       <p:sp>
         <p:nvSpPr>
-          <p:cNvPr id="247" name="Shape 245"/>
+          <p:cNvPr id="252" name="Shape 250"/>
           <p:cNvSpPr/>
           <p:nvPr/>
         </p:nvSpPr>
@@ -8033,7 +8158,7 @@
       </p:sp>
       <p:sp>
         <p:nvSpPr>
-          <p:cNvPr id="248" name="Shape 246"/>
+          <p:cNvPr id="253" name="Shape 251"/>
           <p:cNvSpPr/>
           <p:nvPr/>
         </p:nvSpPr>
@@ -8056,7 +8181,7 @@
       </p:sp>
       <p:sp>
         <p:nvSpPr>
-          <p:cNvPr id="249" name="Shape 247"/>
+          <p:cNvPr id="254" name="Shape 252"/>
           <p:cNvSpPr/>
           <p:nvPr/>
         </p:nvSpPr>
@@ -8079,7 +8204,7 @@
       </p:sp>
       <p:sp>
         <p:nvSpPr>
-          <p:cNvPr id="250" name="Shape 248"/>
+          <p:cNvPr id="255" name="Shape 253"/>
           <p:cNvSpPr/>
           <p:nvPr/>
         </p:nvSpPr>
@@ -8102,7 +8227,7 @@
       </p:sp>
       <p:sp>
         <p:nvSpPr>
-          <p:cNvPr id="251" name="Shape 249"/>
+          <p:cNvPr id="256" name="Shape 254"/>
           <p:cNvSpPr/>
           <p:nvPr/>
         </p:nvSpPr>
@@ -8125,7 +8250,7 @@
       </p:sp>
       <p:sp>
         <p:nvSpPr>
-          <p:cNvPr id="252" name="Shape 250"/>
+          <p:cNvPr id="257" name="Shape 255"/>
           <p:cNvSpPr/>
           <p:nvPr/>
         </p:nvSpPr>
@@ -8148,7 +8273,7 @@
       </p:sp>
       <p:sp>
         <p:nvSpPr>
-          <p:cNvPr id="253" name="Shape 251"/>
+          <p:cNvPr id="258" name="Shape 256"/>
           <p:cNvSpPr/>
           <p:nvPr/>
         </p:nvSpPr>
@@ -8171,7 +8296,7 @@
       </p:sp>
       <p:sp>
         <p:nvSpPr>
-          <p:cNvPr id="254" name="Shape 252"/>
+          <p:cNvPr id="259" name="Shape 257"/>
           <p:cNvSpPr/>
           <p:nvPr/>
         </p:nvSpPr>
@@ -8194,7 +8319,7 @@
       </p:sp>
       <p:sp>
         <p:nvSpPr>
-          <p:cNvPr id="255" name="Shape 253"/>
+          <p:cNvPr id="260" name="Shape 258"/>
           <p:cNvSpPr/>
           <p:nvPr/>
         </p:nvSpPr>
@@ -8217,7 +8342,7 @@
       </p:sp>
       <p:sp>
         <p:nvSpPr>
-          <p:cNvPr id="256" name="Shape 254"/>
+          <p:cNvPr id="261" name="Shape 259"/>
           <p:cNvSpPr/>
           <p:nvPr/>
         </p:nvSpPr>
@@ -8240,14 +8365,14 @@
       </p:sp>
       <p:sp>
         <p:nvSpPr>
-          <p:cNvPr id="257" name="Shape 255"/>
+          <p:cNvPr id="262" name="Shape 260"/>
           <p:cNvSpPr/>
           <p:nvPr/>
         </p:nvSpPr>
         <p:spPr>
           <a:xfrm>
             <a:off x="8890000" y="2933700"/>
-            <a:ext cx="279400" cy="63500"/>
+            <a:ext cx="482600" cy="63500"/>
           </a:xfrm>
           <a:prstGeom prst="line">
             <a:avLst/>
@@ -8263,7 +8388,32 @@
       </p:sp>
       <p:sp>
         <p:nvSpPr>
-          <p:cNvPr id="258" name="Shape 256"/>
+          <p:cNvPr id="263" name="Shape 261"/>
+          <p:cNvSpPr/>
+          <p:nvPr/>
+        </p:nvSpPr>
+        <p:spPr>
+          <a:xfrm rot="5400000">
+            <a:off x="9404350" y="2959100"/>
+            <a:ext cx="76200" cy="76200"/>
+          </a:xfrm>
+          <a:prstGeom prst="triangle">
+            <a:avLst/>
+          </a:prstGeom>
+          <a:solidFill>
+            <a:srgbClr val="1A1000"/>
+          </a:solidFill>
+          <a:ln w="6350">
+            <a:solidFill>
+              <a:srgbClr val="1A1000"/>
+            </a:solidFill>
+            <a:prstDash val="solid"/>
+          </a:ln>
+        </p:spPr>
+      </p:sp>
+      <p:sp>
+        <p:nvSpPr>
+          <p:cNvPr id="264" name="Shape 262"/>
           <p:cNvSpPr/>
           <p:nvPr/>
         </p:nvSpPr>
@@ -8286,7 +8436,7 @@
       </p:sp>
       <p:sp>
         <p:nvSpPr>
-          <p:cNvPr id="259" name="Shape 257"/>
+          <p:cNvPr id="265" name="Shape 263"/>
           <p:cNvSpPr/>
           <p:nvPr/>
         </p:nvSpPr>
@@ -8309,7 +8459,7 @@
       </p:sp>
       <p:sp>
         <p:nvSpPr>
-          <p:cNvPr id="260" name="Shape 258"/>
+          <p:cNvPr id="266" name="Shape 264"/>
           <p:cNvSpPr/>
           <p:nvPr/>
         </p:nvSpPr>
@@ -8332,7 +8482,7 @@
       </p:sp>
       <p:sp>
         <p:nvSpPr>
-          <p:cNvPr id="261" name="Shape 259"/>
+          <p:cNvPr id="267" name="Shape 265"/>
           <p:cNvSpPr/>
           <p:nvPr/>
         </p:nvSpPr>
@@ -8355,7 +8505,7 @@
       </p:sp>
       <p:sp>
         <p:nvSpPr>
-          <p:cNvPr id="262" name="Shape 260"/>
+          <p:cNvPr id="268" name="Shape 266"/>
           <p:cNvSpPr/>
           <p:nvPr/>
         </p:nvSpPr>
@@ -8378,14 +8528,14 @@
       </p:sp>
       <p:sp>
         <p:nvSpPr>
-          <p:cNvPr id="263" name="Shape 261"/>
+          <p:cNvPr id="269" name="Shape 267"/>
           <p:cNvSpPr/>
           <p:nvPr/>
         </p:nvSpPr>
         <p:spPr>
           <a:xfrm>
             <a:off x="7747000" y="3683000"/>
-            <a:ext cx="152400" cy="114300"/>
+            <a:ext cx="152400" cy="76200"/>
           </a:xfrm>
           <a:prstGeom prst="line">
             <a:avLst/>
@@ -8401,14 +8551,14 @@
       </p:sp>
       <p:sp>
         <p:nvSpPr>
-          <p:cNvPr id="264" name="Shape 262"/>
-          <p:cNvSpPr/>
-          <p:nvPr/>
-        </p:nvSpPr>
-        <p:spPr>
-          <a:xfrm>
-            <a:off x="7899400" y="3797300"/>
-            <a:ext cx="355600" cy="177800"/>
+          <p:cNvPr id="270" name="Shape 268"/>
+          <p:cNvSpPr/>
+          <p:nvPr/>
+        </p:nvSpPr>
+        <p:spPr>
+          <a:xfrm>
+            <a:off x="7899400" y="3759200"/>
+            <a:ext cx="203200" cy="63500"/>
           </a:xfrm>
           <a:prstGeom prst="line">
             <a:avLst/>
@@ -8424,7 +8574,32 @@
       </p:sp>
       <p:sp>
         <p:nvSpPr>
-          <p:cNvPr id="265" name="Shape 263"/>
+          <p:cNvPr id="271" name="Shape 269"/>
+          <p:cNvSpPr/>
+          <p:nvPr/>
+        </p:nvSpPr>
+        <p:spPr>
+          <a:xfrm rot="5400000">
+            <a:off x="8159750" y="3810000"/>
+            <a:ext cx="76200" cy="76200"/>
+          </a:xfrm>
+          <a:prstGeom prst="triangle">
+            <a:avLst/>
+          </a:prstGeom>
+          <a:solidFill>
+            <a:srgbClr val="1A1000"/>
+          </a:solidFill>
+          <a:ln w="6350">
+            <a:solidFill>
+              <a:srgbClr val="1A1000"/>
+            </a:solidFill>
+            <a:prstDash val="solid"/>
+          </a:ln>
+        </p:spPr>
+      </p:sp>
+      <p:sp>
+        <p:nvSpPr>
+          <p:cNvPr id="272" name="Shape 270"/>
           <p:cNvSpPr/>
           <p:nvPr/>
         </p:nvSpPr>
@@ -8447,7 +8622,7 @@
       </p:sp>
       <p:sp>
         <p:nvSpPr>
-          <p:cNvPr id="266" name="Shape 264"/>
+          <p:cNvPr id="273" name="Shape 271"/>
           <p:cNvSpPr/>
           <p:nvPr/>
         </p:nvSpPr>
@@ -8470,7 +8645,7 @@
       </p:sp>
       <p:sp>
         <p:nvSpPr>
-          <p:cNvPr id="267" name="Shape 265"/>
+          <p:cNvPr id="274" name="Shape 272"/>
           <p:cNvSpPr/>
           <p:nvPr/>
         </p:nvSpPr>
@@ -8493,7 +8668,7 @@
       </p:sp>
       <p:sp>
         <p:nvSpPr>
-          <p:cNvPr id="268" name="Shape 266"/>
+          <p:cNvPr id="275" name="Shape 273"/>
           <p:cNvSpPr/>
           <p:nvPr/>
         </p:nvSpPr>
@@ -8516,7 +8691,7 @@
       </p:sp>
       <p:sp>
         <p:nvSpPr>
-          <p:cNvPr id="269" name="Shape 267"/>
+          <p:cNvPr id="276" name="Shape 274"/>
           <p:cNvSpPr/>
           <p:nvPr/>
         </p:nvSpPr>
@@ -8539,7 +8714,7 @@
       </p:sp>
       <p:sp>
         <p:nvSpPr>
-          <p:cNvPr id="270" name="Shape 268"/>
+          <p:cNvPr id="277" name="Shape 275"/>
           <p:cNvSpPr/>
           <p:nvPr/>
         </p:nvSpPr>
@@ -8562,7 +8737,7 @@
       </p:sp>
       <p:sp>
         <p:nvSpPr>
-          <p:cNvPr id="271" name="Shape 269"/>
+          <p:cNvPr id="278" name="Shape 276"/>
           <p:cNvSpPr/>
           <p:nvPr/>
         </p:nvSpPr>
@@ -8585,7 +8760,7 @@
       </p:sp>
       <p:sp>
         <p:nvSpPr>
-          <p:cNvPr id="272" name="Shape 270"/>
+          <p:cNvPr id="279" name="Shape 277"/>
           <p:cNvSpPr/>
           <p:nvPr/>
         </p:nvSpPr>
@@ -8608,57 +8783,7 @@
       </p:sp>
       <p:sp>
         <p:nvSpPr>
-          <p:cNvPr id="273" name="Shape 271"/>
-          <p:cNvSpPr/>
-          <p:nvPr/>
-        </p:nvSpPr>
-        <p:spPr>
-          <a:xfrm>
-            <a:off x="8013700" y="3403600"/>
-            <a:ext cx="1193800" cy="1079500"/>
-          </a:xfrm>
-          <a:prstGeom prst="rect">
-            <a:avLst/>
-          </a:prstGeom>
-          <a:solidFill>
-            <a:srgbClr val="C8A888"/>
-          </a:solidFill>
-          <a:ln w="3175">
-            <a:solidFill>
-              <a:srgbClr val="C8A888"/>
-            </a:solidFill>
-            <a:prstDash val="solid"/>
-          </a:ln>
-        </p:spPr>
-      </p:sp>
-      <p:sp>
-        <p:nvSpPr>
-          <p:cNvPr id="274" name="Shape 272"/>
-          <p:cNvSpPr/>
-          <p:nvPr/>
-        </p:nvSpPr>
-        <p:spPr>
-          <a:xfrm>
-            <a:off x="8013700" y="4419600"/>
-            <a:ext cx="228600" cy="279400"/>
-          </a:xfrm>
-          <a:prstGeom prst="rect">
-            <a:avLst/>
-          </a:prstGeom>
-          <a:solidFill>
-            <a:srgbClr val="C8A888"/>
-          </a:solidFill>
-          <a:ln w="3175">
-            <a:solidFill>
-              <a:srgbClr val="C8A888"/>
-            </a:solidFill>
-            <a:prstDash val="solid"/>
-          </a:ln>
-        </p:spPr>
-      </p:sp>
-      <p:sp>
-        <p:nvSpPr>
-          <p:cNvPr id="275" name="Shape 273"/>
+          <p:cNvPr id="280" name="Shape 278"/>
           <p:cNvSpPr/>
           <p:nvPr/>
         </p:nvSpPr>
@@ -8683,7 +8808,7 @@
       </p:sp>
       <p:sp>
         <p:nvSpPr>
-          <p:cNvPr id="276" name="Text 274"/>
+          <p:cNvPr id="281" name="Text 279"/>
           <p:cNvSpPr/>
           <p:nvPr/>
         </p:nvSpPr>
@@ -8708,7 +8833,7 @@
             <a:r>
               <a:rPr lang="en-US" sz="900" b="1" dirty="0">
                 <a:solidFill>
-                  <a:srgbClr val="1B3A5C"/>
+                  <a:srgbClr val="477493"/>
                 </a:solidFill>
                 <a:latin typeface="Arial" pitchFamily="34" charset="0"/>
                 <a:ea typeface="Arial" pitchFamily="34" charset="-122"/>
@@ -8722,7 +8847,7 @@
       </p:sp>
       <p:sp>
         <p:nvSpPr>
-          <p:cNvPr id="277" name="Shape 275"/>
+          <p:cNvPr id="282" name="Shape 280"/>
           <p:cNvSpPr/>
           <p:nvPr/>
         </p:nvSpPr>
@@ -8747,7 +8872,7 @@
       </p:sp>
       <p:sp>
         <p:nvSpPr>
-          <p:cNvPr id="278" name="Text 276"/>
+          <p:cNvPr id="283" name="Text 281"/>
           <p:cNvSpPr/>
           <p:nvPr/>
         </p:nvSpPr>
@@ -8809,7 +8934,7 @@
       </p:sp>
       <p:sp>
         <p:nvSpPr>
-          <p:cNvPr id="279" name="Shape 277"/>
+          <p:cNvPr id="284" name="Shape 282"/>
           <p:cNvSpPr/>
           <p:nvPr/>
         </p:nvSpPr>
@@ -8834,7 +8959,7 @@
       </p:sp>
       <p:sp>
         <p:nvSpPr>
-          <p:cNvPr id="280" name="Text 278"/>
+          <p:cNvPr id="285" name="Text 283"/>
           <p:cNvSpPr/>
           <p:nvPr/>
         </p:nvSpPr>
@@ -8859,7 +8984,7 @@
             <a:r>
               <a:rPr lang="en-US" sz="800" b="1" dirty="0">
                 <a:solidFill>
-                  <a:srgbClr val="1B3A5C"/>
+                  <a:srgbClr val="477493"/>
                 </a:solidFill>
                 <a:latin typeface="Arial" pitchFamily="34" charset="0"/>
                 <a:ea typeface="Arial" pitchFamily="34" charset="-122"/>
@@ -8873,7 +8998,7 @@
       </p:sp>
       <p:sp>
         <p:nvSpPr>
-          <p:cNvPr id="281" name="Shape 279"/>
+          <p:cNvPr id="286" name="Shape 284"/>
           <p:cNvSpPr/>
           <p:nvPr/>
         </p:nvSpPr>
@@ -8896,14 +9021,14 @@
       </p:sp>
       <p:sp>
         <p:nvSpPr>
-          <p:cNvPr id="282" name="Shape 280"/>
+          <p:cNvPr id="287" name="Shape 285"/>
           <p:cNvSpPr/>
           <p:nvPr/>
         </p:nvSpPr>
         <p:spPr>
           <a:xfrm>
             <a:off x="8089900" y="3568700"/>
-            <a:ext cx="152400" cy="0"/>
+            <a:ext cx="127000" cy="0"/>
           </a:xfrm>
           <a:prstGeom prst="line">
             <a:avLst/>
@@ -8919,39 +9044,39 @@
       </p:sp>
       <p:sp>
         <p:nvSpPr>
-          <p:cNvPr id="283" name="Shape 281"/>
+          <p:cNvPr id="288" name="Shape 286"/>
           <p:cNvSpPr/>
           <p:nvPr/>
         </p:nvSpPr>
         <p:spPr>
           <a:xfrm rot="5400000">
-            <a:off x="8235950" y="3530600"/>
+            <a:off x="8223250" y="3530600"/>
             <a:ext cx="76200" cy="76200"/>
           </a:xfrm>
           <a:prstGeom prst="triangle">
             <a:avLst/>
           </a:prstGeom>
           <a:solidFill>
-            <a:srgbClr val="2F6476"/>
+            <a:srgbClr val="7FB421"/>
           </a:solidFill>
           <a:ln w="6350">
             <a:solidFill>
-              <a:srgbClr val="2F6476"/>
-            </a:solidFill>
-            <a:prstDash val="solid"/>
-          </a:ln>
-        </p:spPr>
-      </p:sp>
-      <p:sp>
-        <p:nvSpPr>
-          <p:cNvPr id="284" name="Shape 282"/>
+              <a:srgbClr val="7FB421"/>
+            </a:solidFill>
+            <a:prstDash val="solid"/>
+          </a:ln>
+        </p:spPr>
+      </p:sp>
+      <p:sp>
+        <p:nvSpPr>
+          <p:cNvPr id="289" name="Shape 287"/>
           <p:cNvSpPr/>
           <p:nvPr/>
         </p:nvSpPr>
         <p:spPr>
           <a:xfrm>
             <a:off x="8089900" y="4445000"/>
-            <a:ext cx="190500" cy="0"/>
+            <a:ext cx="127000" cy="0"/>
           </a:xfrm>
           <a:prstGeom prst="line">
             <a:avLst/>
@@ -8967,39 +9092,39 @@
       </p:sp>
       <p:sp>
         <p:nvSpPr>
-          <p:cNvPr id="285" name="Shape 283"/>
+          <p:cNvPr id="290" name="Shape 288"/>
           <p:cNvSpPr/>
           <p:nvPr/>
         </p:nvSpPr>
         <p:spPr>
           <a:xfrm rot="5400000">
-            <a:off x="8274050" y="4406900"/>
+            <a:off x="8223250" y="4406900"/>
             <a:ext cx="76200" cy="76200"/>
           </a:xfrm>
           <a:prstGeom prst="triangle">
             <a:avLst/>
           </a:prstGeom>
           <a:solidFill>
-            <a:srgbClr val="2F6476"/>
+            <a:srgbClr val="7FB421"/>
           </a:solidFill>
           <a:ln w="6350">
             <a:solidFill>
-              <a:srgbClr val="2F6476"/>
-            </a:solidFill>
-            <a:prstDash val="solid"/>
-          </a:ln>
-        </p:spPr>
-      </p:sp>
-      <p:sp>
-        <p:nvSpPr>
-          <p:cNvPr id="286" name="Shape 284"/>
-          <p:cNvSpPr/>
-          <p:nvPr/>
-        </p:nvSpPr>
-        <p:spPr>
-          <a:xfrm>
-            <a:off x="8102600" y="4178300"/>
-            <a:ext cx="609600" cy="0"/>
+              <a:srgbClr val="7FB421"/>
+            </a:solidFill>
+            <a:prstDash val="solid"/>
+          </a:ln>
+        </p:spPr>
+      </p:sp>
+      <p:sp>
+        <p:nvSpPr>
+          <p:cNvPr id="291" name="Shape 289"/>
+          <p:cNvSpPr/>
+          <p:nvPr/>
+        </p:nvSpPr>
+        <p:spPr>
+          <a:xfrm>
+            <a:off x="8191500" y="4178300"/>
+            <a:ext cx="520700" cy="0"/>
           </a:xfrm>
           <a:prstGeom prst="line">
             <a:avLst/>
@@ -9015,14 +9140,39 @@
       </p:sp>
       <p:sp>
         <p:nvSpPr>
-          <p:cNvPr id="287" name="Shape 285"/>
-          <p:cNvSpPr/>
-          <p:nvPr/>
-        </p:nvSpPr>
-        <p:spPr>
-          <a:xfrm>
-            <a:off x="8089900" y="5105400"/>
-            <a:ext cx="635000" cy="0"/>
+          <p:cNvPr id="292" name="Shape 290"/>
+          <p:cNvSpPr/>
+          <p:nvPr/>
+        </p:nvSpPr>
+        <p:spPr>
+          <a:xfrm rot="16200000">
+            <a:off x="8121650" y="4140200"/>
+            <a:ext cx="76200" cy="76200"/>
+          </a:xfrm>
+          <a:prstGeom prst="triangle">
+            <a:avLst/>
+          </a:prstGeom>
+          <a:solidFill>
+            <a:srgbClr val="7FB421"/>
+          </a:solidFill>
+          <a:ln w="6350">
+            <a:solidFill>
+              <a:srgbClr val="7FB421"/>
+            </a:solidFill>
+            <a:prstDash val="solid"/>
+          </a:ln>
+        </p:spPr>
+      </p:sp>
+      <p:sp>
+        <p:nvSpPr>
+          <p:cNvPr id="293" name="Shape 291"/>
+          <p:cNvSpPr/>
+          <p:nvPr/>
+        </p:nvSpPr>
+        <p:spPr>
+          <a:xfrm>
+            <a:off x="8191500" y="5105400"/>
+            <a:ext cx="533400" cy="0"/>
           </a:xfrm>
           <a:prstGeom prst="line">
             <a:avLst/>
@@ -9038,7 +9188,32 @@
       </p:sp>
       <p:sp>
         <p:nvSpPr>
-          <p:cNvPr id="288" name="Shape 286"/>
+          <p:cNvPr id="294" name="Shape 292"/>
+          <p:cNvSpPr/>
+          <p:nvPr/>
+        </p:nvSpPr>
+        <p:spPr>
+          <a:xfrm rot="16200000">
+            <a:off x="8121650" y="5067300"/>
+            <a:ext cx="76200" cy="76200"/>
+          </a:xfrm>
+          <a:prstGeom prst="triangle">
+            <a:avLst/>
+          </a:prstGeom>
+          <a:solidFill>
+            <a:srgbClr val="7FB421"/>
+          </a:solidFill>
+          <a:ln w="6350">
+            <a:solidFill>
+              <a:srgbClr val="7FB421"/>
+            </a:solidFill>
+            <a:prstDash val="solid"/>
+          </a:ln>
+        </p:spPr>
+      </p:sp>
+      <p:sp>
+        <p:nvSpPr>
+          <p:cNvPr id="295" name="Shape 293"/>
           <p:cNvSpPr/>
           <p:nvPr/>
         </p:nvSpPr>
@@ -9063,7 +9238,7 @@
       </p:sp>
       <p:sp>
         <p:nvSpPr>
-          <p:cNvPr id="289" name="Text 287"/>
+          <p:cNvPr id="296" name="Text 294"/>
           <p:cNvSpPr/>
           <p:nvPr/>
         </p:nvSpPr>
@@ -9102,89 +9277,14 @@
       </p:sp>
       <p:sp>
         <p:nvSpPr>
-          <p:cNvPr id="290" name="Shape 288"/>
-          <p:cNvSpPr/>
-          <p:nvPr/>
-        </p:nvSpPr>
-        <p:spPr>
-          <a:xfrm>
-            <a:off x="9474200" y="2578100"/>
-            <a:ext cx="1181100" cy="215900"/>
-          </a:xfrm>
-          <a:prstGeom prst="rect">
-            <a:avLst/>
-          </a:prstGeom>
-          <a:solidFill>
-            <a:srgbClr val="B0B070"/>
-          </a:solidFill>
-          <a:ln w="3175">
-            <a:solidFill>
-              <a:srgbClr val="B0B070"/>
-            </a:solidFill>
-            <a:prstDash val="solid"/>
-          </a:ln>
-        </p:spPr>
-      </p:sp>
-      <p:sp>
-        <p:nvSpPr>
-          <p:cNvPr id="291" name="Shape 289"/>
-          <p:cNvSpPr/>
-          <p:nvPr/>
-        </p:nvSpPr>
-        <p:spPr>
-          <a:xfrm>
-            <a:off x="9474200" y="2806700"/>
-            <a:ext cx="1181100" cy="558800"/>
-          </a:xfrm>
-          <a:prstGeom prst="rect">
-            <a:avLst/>
-          </a:prstGeom>
-          <a:solidFill>
-            <a:srgbClr val="B0B070"/>
-          </a:solidFill>
-          <a:ln w="3175">
-            <a:solidFill>
-              <a:srgbClr val="B0B070"/>
-            </a:solidFill>
-            <a:prstDash val="solid"/>
-          </a:ln>
-        </p:spPr>
-      </p:sp>
-      <p:sp>
-        <p:nvSpPr>
-          <p:cNvPr id="292" name="Shape 290"/>
-          <p:cNvSpPr/>
-          <p:nvPr/>
-        </p:nvSpPr>
-        <p:spPr>
-          <a:xfrm>
-            <a:off x="9474200" y="3365500"/>
-            <a:ext cx="1181100" cy="152400"/>
-          </a:xfrm>
-          <a:prstGeom prst="rect">
-            <a:avLst/>
-          </a:prstGeom>
-          <a:solidFill>
-            <a:srgbClr val="B0B070"/>
-          </a:solidFill>
-          <a:ln w="3175">
-            <a:solidFill>
-              <a:srgbClr val="B0B070"/>
-            </a:solidFill>
-            <a:prstDash val="solid"/>
-          </a:ln>
-        </p:spPr>
-      </p:sp>
-      <p:sp>
-        <p:nvSpPr>
-          <p:cNvPr id="293" name="Shape 291"/>
+          <p:cNvPr id="297" name="Shape 295"/>
           <p:cNvSpPr/>
           <p:nvPr/>
         </p:nvSpPr>
         <p:spPr>
           <a:xfrm>
             <a:off x="9563100" y="2622550"/>
-            <a:ext cx="812800" cy="152400"/>
+            <a:ext cx="812800" cy="158750"/>
           </a:xfrm>
           <a:prstGeom prst="rect">
             <a:avLst/>
@@ -9202,14 +9302,14 @@
       </p:sp>
       <p:sp>
         <p:nvSpPr>
-          <p:cNvPr id="294" name="Text 292"/>
+          <p:cNvPr id="298" name="Text 296"/>
           <p:cNvSpPr/>
           <p:nvPr/>
         </p:nvSpPr>
         <p:spPr>
           <a:xfrm>
             <a:off x="9563100" y="2622550"/>
-            <a:ext cx="812800" cy="152400"/>
+            <a:ext cx="812800" cy="158750"/>
           </a:xfrm>
           <a:prstGeom prst="rect">
             <a:avLst/>
@@ -9227,7 +9327,7 @@
             <a:r>
               <a:rPr lang="en-US" sz="800" b="1" dirty="0">
                 <a:solidFill>
-                  <a:srgbClr val="1B3A5C"/>
+                  <a:srgbClr val="327389"/>
                 </a:solidFill>
                 <a:latin typeface="Arial" pitchFamily="34" charset="0"/>
                 <a:ea typeface="Arial" pitchFamily="34" charset="-122"/>
@@ -9241,7 +9341,7 @@
       </p:sp>
       <p:sp>
         <p:nvSpPr>
-          <p:cNvPr id="295" name="Shape 293"/>
+          <p:cNvPr id="299" name="Shape 297"/>
           <p:cNvSpPr/>
           <p:nvPr/>
         </p:nvSpPr>
@@ -9266,7 +9366,7 @@
       </p:sp>
       <p:sp>
         <p:nvSpPr>
-          <p:cNvPr id="296" name="Text 294"/>
+          <p:cNvPr id="300" name="Text 298"/>
           <p:cNvSpPr/>
           <p:nvPr/>
         </p:nvSpPr>
@@ -9328,14 +9428,14 @@
       </p:sp>
       <p:sp>
         <p:nvSpPr>
-          <p:cNvPr id="297" name="Shape 295"/>
-          <p:cNvSpPr/>
-          <p:nvPr/>
-        </p:nvSpPr>
-        <p:spPr>
-          <a:xfrm>
-            <a:off x="9563100" y="3371850"/>
-            <a:ext cx="812800" cy="114300"/>
+          <p:cNvPr id="301" name="Shape 299"/>
+          <p:cNvSpPr/>
+          <p:nvPr/>
+        </p:nvSpPr>
+        <p:spPr>
+          <a:xfrm>
+            <a:off x="9563100" y="3346450"/>
+            <a:ext cx="812800" cy="139700"/>
           </a:xfrm>
           <a:prstGeom prst="rect">
             <a:avLst/>
@@ -9353,14 +9453,14 @@
       </p:sp>
       <p:sp>
         <p:nvSpPr>
-          <p:cNvPr id="298" name="Text 296"/>
-          <p:cNvSpPr/>
-          <p:nvPr/>
-        </p:nvSpPr>
-        <p:spPr>
-          <a:xfrm>
-            <a:off x="9563100" y="3371850"/>
-            <a:ext cx="812800" cy="114300"/>
+          <p:cNvPr id="302" name="Text 300"/>
+          <p:cNvSpPr/>
+          <p:nvPr/>
+        </p:nvSpPr>
+        <p:spPr>
+          <a:xfrm>
+            <a:off x="9563100" y="3346450"/>
+            <a:ext cx="812800" cy="139700"/>
           </a:xfrm>
           <a:prstGeom prst="rect">
             <a:avLst/>
@@ -9378,7 +9478,7 @@
             <a:r>
               <a:rPr lang="en-US" sz="750" b="1" dirty="0">
                 <a:solidFill>
-                  <a:srgbClr val="1B3A5C"/>
+                  <a:srgbClr val="327389"/>
                 </a:solidFill>
                 <a:latin typeface="Arial" pitchFamily="34" charset="0"/>
                 <a:ea typeface="Arial" pitchFamily="34" charset="-122"/>
@@ -9392,7 +9492,7 @@
       </p:sp>
       <p:sp>
         <p:nvSpPr>
-          <p:cNvPr id="299" name="Shape 297"/>
+          <p:cNvPr id="303" name="Shape 301"/>
           <p:cNvSpPr/>
           <p:nvPr/>
         </p:nvSpPr>
@@ -9417,7 +9517,7 @@
       </p:sp>
       <p:sp>
         <p:nvSpPr>
-          <p:cNvPr id="300" name="Shape 298"/>
+          <p:cNvPr id="304" name="Shape 302"/>
           <p:cNvSpPr/>
           <p:nvPr/>
         </p:nvSpPr>
@@ -9442,7 +9542,7 @@
       </p:sp>
       <p:sp>
         <p:nvSpPr>
-          <p:cNvPr id="301" name="Shape 299"/>
+          <p:cNvPr id="305" name="Shape 303"/>
           <p:cNvSpPr/>
           <p:nvPr/>
         </p:nvSpPr>
@@ -9467,7 +9567,7 @@
       </p:sp>
       <p:sp>
         <p:nvSpPr>
-          <p:cNvPr id="302" name="Text 300"/>
+          <p:cNvPr id="306" name="Text 304"/>
           <p:cNvSpPr/>
           <p:nvPr/>
         </p:nvSpPr>
@@ -9492,7 +9592,7 @@
             <a:r>
               <a:rPr lang="en-US" sz="800" b="1" dirty="0">
                 <a:solidFill>
-                  <a:srgbClr val="2E3E8C"/>
+                  <a:srgbClr val="4863BE"/>
                 </a:solidFill>
                 <a:latin typeface="Arial" pitchFamily="34" charset="0"/>
                 <a:ea typeface="Arial" pitchFamily="34" charset="-122"/>
@@ -9506,7 +9606,7 @@
       </p:sp>
       <p:sp>
         <p:nvSpPr>
-          <p:cNvPr id="303" name="Shape 301"/>
+          <p:cNvPr id="307" name="Shape 305"/>
           <p:cNvSpPr/>
           <p:nvPr/>
         </p:nvSpPr>
@@ -9529,7 +9629,7 @@
       </p:sp>
       <p:sp>
         <p:nvSpPr>
-          <p:cNvPr id="304" name="Shape 302"/>
+          <p:cNvPr id="308" name="Shape 306"/>
           <p:cNvSpPr/>
           <p:nvPr/>
         </p:nvSpPr>
@@ -9552,7 +9652,7 @@
       </p:sp>
       <p:sp>
         <p:nvSpPr>
-          <p:cNvPr id="305" name="Shape 303"/>
+          <p:cNvPr id="309" name="Shape 307"/>
           <p:cNvSpPr/>
           <p:nvPr/>
         </p:nvSpPr>
@@ -9575,7 +9675,7 @@
       </p:sp>
       <p:sp>
         <p:nvSpPr>
-          <p:cNvPr id="306" name="Shape 304"/>
+          <p:cNvPr id="310" name="Shape 308"/>
           <p:cNvSpPr/>
           <p:nvPr/>
         </p:nvSpPr>
@@ -9598,7 +9698,7 @@
       </p:sp>
       <p:sp>
         <p:nvSpPr>
-          <p:cNvPr id="307" name="Shape 305"/>
+          <p:cNvPr id="311" name="Shape 309"/>
           <p:cNvSpPr/>
           <p:nvPr/>
         </p:nvSpPr>
@@ -9621,7 +9721,7 @@
       </p:sp>
       <p:sp>
         <p:nvSpPr>
-          <p:cNvPr id="308" name="Shape 306"/>
+          <p:cNvPr id="312" name="Shape 310"/>
           <p:cNvSpPr/>
           <p:nvPr/>
         </p:nvSpPr>
@@ -9644,7 +9744,7 @@
       </p:sp>
       <p:sp>
         <p:nvSpPr>
-          <p:cNvPr id="309" name="Shape 307"/>
+          <p:cNvPr id="313" name="Shape 311"/>
           <p:cNvSpPr/>
           <p:nvPr/>
         </p:nvSpPr>
@@ -9660,6 +9760,225 @@
           <a:ln w="44450">
             <a:solidFill>
               <a:srgbClr val="8CC62E"/>
+            </a:solidFill>
+            <a:prstDash val="solid"/>
+          </a:ln>
+        </p:spPr>
+      </p:sp>
+      <p:sp>
+        <p:nvSpPr>
+          <p:cNvPr id="314" name="Shape 312"/>
+          <p:cNvSpPr/>
+          <p:nvPr/>
+        </p:nvSpPr>
+        <p:spPr>
+          <a:xfrm>
+            <a:off x="9912350" y="2473325"/>
+            <a:ext cx="76200" cy="57150"/>
+          </a:xfrm>
+          <a:prstGeom prst="triangle">
+            <a:avLst/>
+          </a:prstGeom>
+          <a:solidFill>
+            <a:srgbClr val="05008F"/>
+          </a:solidFill>
+          <a:ln w="6350">
+            <a:solidFill>
+              <a:srgbClr val="05008F"/>
+            </a:solidFill>
+            <a:prstDash val="solid"/>
+          </a:ln>
+        </p:spPr>
+      </p:sp>
+      <p:sp>
+        <p:nvSpPr>
+          <p:cNvPr id="315" name="Shape 313"/>
+          <p:cNvSpPr/>
+          <p:nvPr/>
+        </p:nvSpPr>
+        <p:spPr>
+          <a:xfrm>
+            <a:off x="9912350" y="2536825"/>
+            <a:ext cx="76200" cy="57150"/>
+          </a:xfrm>
+          <a:prstGeom prst="triangle">
+            <a:avLst/>
+          </a:prstGeom>
+          <a:solidFill>
+            <a:srgbClr val="05008F"/>
+          </a:solidFill>
+          <a:ln w="6350">
+            <a:solidFill>
+              <a:srgbClr val="05008F"/>
+            </a:solidFill>
+            <a:prstDash val="solid"/>
+          </a:ln>
+        </p:spPr>
+      </p:sp>
+      <p:sp>
+        <p:nvSpPr>
+          <p:cNvPr id="316" name="Shape 314"/>
+          <p:cNvSpPr/>
+          <p:nvPr/>
+        </p:nvSpPr>
+        <p:spPr>
+          <a:xfrm>
+            <a:off x="9912350" y="3216275"/>
+            <a:ext cx="76200" cy="57150"/>
+          </a:xfrm>
+          <a:prstGeom prst="triangle">
+            <a:avLst/>
+          </a:prstGeom>
+          <a:solidFill>
+            <a:srgbClr val="05008F"/>
+          </a:solidFill>
+          <a:ln w="6350">
+            <a:solidFill>
+              <a:srgbClr val="05008F"/>
+            </a:solidFill>
+            <a:prstDash val="solid"/>
+          </a:ln>
+        </p:spPr>
+      </p:sp>
+      <p:sp>
+        <p:nvSpPr>
+          <p:cNvPr id="317" name="Shape 315"/>
+          <p:cNvSpPr/>
+          <p:nvPr/>
+        </p:nvSpPr>
+        <p:spPr>
+          <a:xfrm>
+            <a:off x="9912350" y="3267075"/>
+            <a:ext cx="76200" cy="57150"/>
+          </a:xfrm>
+          <a:prstGeom prst="triangle">
+            <a:avLst/>
+          </a:prstGeom>
+          <a:solidFill>
+            <a:srgbClr val="05008F"/>
+          </a:solidFill>
+          <a:ln w="6350">
+            <a:solidFill>
+              <a:srgbClr val="05008F"/>
+            </a:solidFill>
+            <a:prstDash val="solid"/>
+          </a:ln>
+        </p:spPr>
+      </p:sp>
+      <p:sp>
+        <p:nvSpPr>
+          <p:cNvPr id="318" name="Shape 316"/>
+          <p:cNvSpPr/>
+          <p:nvPr/>
+        </p:nvSpPr>
+        <p:spPr>
+          <a:xfrm>
+            <a:off x="9766300" y="3946525"/>
+            <a:ext cx="76200" cy="57150"/>
+          </a:xfrm>
+          <a:prstGeom prst="triangle">
+            <a:avLst/>
+          </a:prstGeom>
+          <a:solidFill>
+            <a:srgbClr val="05008F"/>
+          </a:solidFill>
+          <a:ln w="6350">
+            <a:solidFill>
+              <a:srgbClr val="05008F"/>
+            </a:solidFill>
+            <a:prstDash val="solid"/>
+          </a:ln>
+        </p:spPr>
+      </p:sp>
+      <p:sp>
+        <p:nvSpPr>
+          <p:cNvPr id="319" name="Shape 317"/>
+          <p:cNvSpPr/>
+          <p:nvPr/>
+        </p:nvSpPr>
+        <p:spPr>
+          <a:xfrm>
+            <a:off x="9766300" y="4010025"/>
+            <a:ext cx="76200" cy="57150"/>
+          </a:xfrm>
+          <a:prstGeom prst="triangle">
+            <a:avLst/>
+          </a:prstGeom>
+          <a:solidFill>
+            <a:srgbClr val="05008F"/>
+          </a:solidFill>
+          <a:ln w="6350">
+            <a:solidFill>
+              <a:srgbClr val="05008F"/>
+            </a:solidFill>
+            <a:prstDash val="solid"/>
+          </a:ln>
+        </p:spPr>
+      </p:sp>
+      <p:sp>
+        <p:nvSpPr>
+          <p:cNvPr id="320" name="Shape 318"/>
+          <p:cNvSpPr/>
+          <p:nvPr/>
+        </p:nvSpPr>
+        <p:spPr>
+          <a:xfrm>
+            <a:off x="9499600" y="3517900"/>
+            <a:ext cx="927100" cy="0"/>
+          </a:xfrm>
+          <a:prstGeom prst="line">
+            <a:avLst/>
+          </a:prstGeom>
+          <a:noFill/>
+          <a:ln w="28575">
+            <a:solidFill>
+              <a:srgbClr val="C00000"/>
+            </a:solidFill>
+            <a:prstDash val="solid"/>
+          </a:ln>
+        </p:spPr>
+      </p:sp>
+      <p:sp>
+        <p:nvSpPr>
+          <p:cNvPr id="321" name="Shape 319"/>
+          <p:cNvSpPr/>
+          <p:nvPr/>
+        </p:nvSpPr>
+        <p:spPr>
+          <a:xfrm>
+            <a:off x="9499600" y="3930650"/>
+            <a:ext cx="927100" cy="0"/>
+          </a:xfrm>
+          <a:prstGeom prst="line">
+            <a:avLst/>
+          </a:prstGeom>
+          <a:noFill/>
+          <a:ln w="28575">
+            <a:solidFill>
+              <a:srgbClr val="C00000"/>
+            </a:solidFill>
+            <a:prstDash val="solid"/>
+          </a:ln>
+        </p:spPr>
+      </p:sp>
+      <p:sp>
+        <p:nvSpPr>
+          <p:cNvPr id="322" name="Shape 320"/>
+          <p:cNvSpPr/>
+          <p:nvPr/>
+        </p:nvSpPr>
+        <p:spPr>
+          <a:xfrm>
+            <a:off x="10420350" y="3517900"/>
+            <a:ext cx="0" cy="419100"/>
+          </a:xfrm>
+          <a:prstGeom prst="line">
+            <a:avLst/>
+          </a:prstGeom>
+          <a:noFill/>
+          <a:ln w="28575">
+            <a:solidFill>
+              <a:srgbClr val="C00000"/>
             </a:solidFill>
             <a:prstDash val="solid"/>
           </a:ln>
